--- a/disserta-apresenta/apresentacao_seminario.pptx
+++ b/disserta-apresenta/apresentacao_seminario.pptx
@@ -6434,7 +6434,7 @@
                 </a:solidFill>
                 <a:latin typeface="Calibri"/>
               </a:rPr>
-              <a:t>✓  Sem acesso directo ao ROS 2</a:t>
+              <a:t>✓  Sem acesso direto ao ROS 2</a:t>
             </a:r>
           </a:p>
         </p:txBody>
@@ -6800,7 +6800,7 @@
                 </a:solidFill>
                 <a:latin typeface="Calibri"/>
               </a:rPr>
-              <a:t>Cada agente só actua no seu próprio robô — um agente nunca move o robô de outro.</a:t>
+              <a:t>Cada agente só atua no seu próprio robô — um agente nunca move o robô de outro.</a:t>
             </a:r>
           </a:p>
         </p:txBody>
@@ -8310,7 +8310,7 @@
                 </a:solidFill>
                 <a:latin typeface="Calibri"/>
               </a:rPr>
-              <a:t>02.  Objectivos</a:t>
+              <a:t>02.  Objetivos</a:t>
             </a:r>
           </a:p>
         </p:txBody>
@@ -8388,7 +8388,7 @@
                 </a:solidFill>
                 <a:latin typeface="Calibri"/>
               </a:rPr>
-              <a:t>03.  Arquitectura do sistema + Agentes de IA</a:t>
+              <a:t>03.  Arquitetura do sistema + Agentes de IA</a:t>
             </a:r>
           </a:p>
         </p:txBody>
@@ -9275,7 +9275,7 @@
                 </a:solidFill>
                 <a:latin typeface="Calibri"/>
               </a:rPr>
-              <a:t>    • Arquitectura de papéis para testbeds distribuídos (MUUT / FUUT / SU)</a:t>
+              <a:t>    • Arquitetura de papéis para testbeds distribuídos (MUUT / FUUT / SU)</a:t>
             </a:r>
           </a:p>
         </p:txBody>
@@ -9457,7 +9457,7 @@
                 </a:solidFill>
                 <a:latin typeface="Calibri"/>
               </a:rPr>
-              <a:t>Objectivos</a:t>
+              <a:t>Objetivos</a:t>
             </a:r>
           </a:p>
         </p:txBody>
@@ -10395,7 +10395,7 @@
                 </a:solidFill>
                 <a:latin typeface="Calibri"/>
               </a:rPr>
-              <a:t>Arquitectura do Sistema</a:t>
+              <a:t>Arquitetura do Sistema</a:t>
             </a:r>
           </a:p>
         </p:txBody>
@@ -11325,7 +11325,7 @@
                 </a:solidFill>
                 <a:latin typeface="Calibri"/>
               </a:rPr>
-              <a:t>Arquitectura de responsabilidades por unidade robótica</a:t>
+              <a:t>Arquitetura de responsabilidades por unidade robótica</a:t>
             </a:r>
           </a:p>
         </p:txBody>
@@ -11734,7 +11734,7 @@
                 </a:solidFill>
                 <a:latin typeface="Calibri"/>
               </a:rPr>
-              <a:t>✓  Fonte de trajectória repetível</a:t>
+              <a:t>✓  Fonte de trajetória repetível</a:t>
             </a:r>
           </a:p>
         </p:txBody>
@@ -13815,7 +13815,7 @@
                 </a:solidFill>
                 <a:latin typeface="Calibri"/>
               </a:rPr>
-              <a:t>⚠  Entre repetições: go_to_point(0,0,0) para retornar ao ponto de partida — condição necessária para a comparação de trajectórias.</a:t>
+              <a:t>⚠  Entre repetições: go_to_point(0,0,0) para retornar ao ponto de partida — condição necessária para a comparação de trajetórias.</a:t>
             </a:r>
           </a:p>
         </p:txBody>

--- a/disserta-apresenta/apresentacao_seminario.pptx
+++ b/disserta-apresenta/apresentacao_seminario.pptx
@@ -15,6 +15,7 @@
     <p:sldId id="262" r:id="rId9"/>
     <p:sldId id="263" r:id="rId10"/>
     <p:sldId id="264" r:id="rId11"/>
+    <p:sldId id="269" r:id="rId19"/>
     <p:sldId id="265" r:id="rId12"/>
     <p:sldId id="268" r:id="rId13"/>
     <p:sldId id="266" r:id="rId14"/>
@@ -6587,7 +6588,7 @@
                 </a:solidFill>
                 <a:latin typeface="Calibri"/>
               </a:rPr>
-              <a:t>Campanha com N maior (10–20 réplicas) para significância estatística</a:t>
+              <a:t>Avaliar se a camada de agentes de IA degrada a repetibilidade</a:t>
             </a:r>
           </a:p>
         </p:txBody>
@@ -7078,7 +7079,7 @@
                 </a:solidFill>
                 <a:latin typeface="Calibri"/>
               </a:rPr>
-              <a:t>→  Próximo: metodologia baseline/replay + campanha estatística maior</a:t>
+              <a:t>→  Próximo: baseline via play_route + avaliar impacto dos agentes de IA</a:t>
             </a:r>
           </a:p>
         </p:txBody>
@@ -7114,6 +7115,950 @@
                 <a:latin typeface="Calibri"/>
               </a:rPr>
               <a:t>Obrigado — Questões?</a:t>
+            </a:r>
+          </a:p>
+        </p:txBody>
+      </p:sp>
+    </p:spTree>
+  </p:cSld>
+  <p:clrMapOvr>
+    <a:masterClrMapping/>
+  </p:clrMapOvr>
+</p:sld>
+</file>
+
+<file path=ppt/slides/slide14.xml><?xml version="1.0" encoding="utf-8"?>
+<p:sld xmlns:a="http://schemas.openxmlformats.org/drawingml/2006/main" xmlns:r="http://schemas.openxmlformats.org/officeDocument/2006/relationships" xmlns:p="http://schemas.openxmlformats.org/presentationml/2006/main">
+  <p:cSld>
+    <p:spTree>
+      <p:nvGrpSpPr>
+        <p:cNvPr id="1" name=""/>
+        <p:cNvGrpSpPr/>
+        <p:nvPr/>
+      </p:nvGrpSpPr>
+      <p:grpSpPr>
+        <a:xfrm>
+          <a:off x="0" y="0"/>
+          <a:ext cx="0" cy="0"/>
+          <a:chOff x="0" y="0"/>
+          <a:chExt cx="0" cy="0"/>
+        </a:xfrm>
+      </p:grpSpPr>
+      <p:sp>
+        <p:nvSpPr>
+          <p:cNvPr id="2" name="Rectangle 1"/>
+          <p:cNvSpPr/>
+          <p:nvPr/>
+        </p:nvSpPr>
+        <p:spPr>
+          <a:xfrm>
+            <a:off x="0" y="0"/>
+            <a:ext cx="12188952" cy="6858000"/>
+          </a:xfrm>
+          <a:prstGeom prst="rect">
+            <a:avLst/>
+          </a:prstGeom>
+          <a:solidFill>
+            <a:srgbClr val="FFFFFF"/>
+          </a:solidFill>
+          <a:ln>
+            <a:noFill/>
+          </a:ln>
+        </p:spPr>
+        <p:style>
+          <a:lnRef idx="1">
+            <a:schemeClr val="accent1"/>
+          </a:lnRef>
+          <a:fillRef idx="3">
+            <a:schemeClr val="accent1"/>
+          </a:fillRef>
+          <a:effectRef idx="2">
+            <a:schemeClr val="accent1"/>
+          </a:effectRef>
+          <a:fontRef idx="minor">
+            <a:schemeClr val="lt1"/>
+          </a:fontRef>
+        </p:style>
+        <p:txBody>
+          <a:bodyPr rtlCol="0" anchor="ctr"/>
+          <a:lstStyle/>
+          <a:p>
+            <a:pPr algn="ctr"/>
+            <a:endParaRPr/>
+          </a:p>
+        </p:txBody>
+      </p:sp>
+      <p:sp>
+        <p:nvSpPr>
+          <p:cNvPr id="3" name="Rectangle 2"/>
+          <p:cNvSpPr/>
+          <p:nvPr/>
+        </p:nvSpPr>
+        <p:spPr>
+          <a:xfrm>
+            <a:off x="0" y="0"/>
+            <a:ext cx="12188952" cy="1143000"/>
+          </a:xfrm>
+          <a:prstGeom prst="rect">
+            <a:avLst/>
+          </a:prstGeom>
+          <a:solidFill>
+            <a:srgbClr val="1B2A4A"/>
+          </a:solidFill>
+          <a:ln>
+            <a:noFill/>
+          </a:ln>
+        </p:spPr>
+        <p:style>
+          <a:lnRef idx="1">
+            <a:schemeClr val="accent1"/>
+          </a:lnRef>
+          <a:fillRef idx="3">
+            <a:schemeClr val="accent1"/>
+          </a:fillRef>
+          <a:effectRef idx="2">
+            <a:schemeClr val="accent1"/>
+          </a:effectRef>
+          <a:fontRef idx="minor">
+            <a:schemeClr val="lt1"/>
+          </a:fontRef>
+        </p:style>
+        <p:txBody>
+          <a:bodyPr rtlCol="0" anchor="ctr"/>
+          <a:lstStyle/>
+          <a:p>
+            <a:pPr algn="ctr"/>
+            <a:endParaRPr/>
+          </a:p>
+        </p:txBody>
+      </p:sp>
+      <p:sp>
+        <p:nvSpPr>
+          <p:cNvPr id="4" name="Rectangle 3"/>
+          <p:cNvSpPr/>
+          <p:nvPr/>
+        </p:nvSpPr>
+        <p:spPr>
+          <a:xfrm>
+            <a:off x="0" y="1143000"/>
+            <a:ext cx="12188952" cy="45720"/>
+          </a:xfrm>
+          <a:prstGeom prst="rect">
+            <a:avLst/>
+          </a:prstGeom>
+          <a:solidFill>
+            <a:srgbClr val="225AC2"/>
+          </a:solidFill>
+          <a:ln>
+            <a:noFill/>
+          </a:ln>
+        </p:spPr>
+        <p:style>
+          <a:lnRef idx="1">
+            <a:schemeClr val="accent1"/>
+          </a:lnRef>
+          <a:fillRef idx="3">
+            <a:schemeClr val="accent1"/>
+          </a:fillRef>
+          <a:effectRef idx="2">
+            <a:schemeClr val="accent1"/>
+          </a:effectRef>
+          <a:fontRef idx="minor">
+            <a:schemeClr val="lt1"/>
+          </a:fontRef>
+        </p:style>
+        <p:txBody>
+          <a:bodyPr rtlCol="0" anchor="ctr"/>
+          <a:lstStyle/>
+          <a:p>
+            <a:pPr algn="ctr"/>
+            <a:endParaRPr/>
+          </a:p>
+        </p:txBody>
+      </p:sp>
+      <p:sp>
+        <p:nvSpPr>
+          <p:cNvPr id="5" name="TextBox 4"/>
+          <p:cNvSpPr txBox="1"/>
+          <p:nvPr/>
+        </p:nvSpPr>
+        <p:spPr>
+          <a:xfrm>
+            <a:off x="457200" y="137160"/>
+            <a:ext cx="11430000" cy="640080"/>
+          </a:xfrm>
+          <a:prstGeom prst="rect">
+            <a:avLst/>
+          </a:prstGeom>
+          <a:noFill/>
+        </p:spPr>
+        <p:txBody>
+          <a:bodyPr wrap="square">
+            <a:spAutoFit/>
+          </a:bodyPr>
+          <a:lstStyle/>
+          <a:p>
+            <a:pPr algn="l"/>
+            <a:r>
+              <a:rPr sz="3000" b="1" i="0">
+                <a:solidFill>
+                  <a:srgbClr val="FFFFFF"/>
+                </a:solidFill>
+                <a:latin typeface="Calibri"/>
+              </a:rPr>
+              <a:t>Fonte de Trajetória: Odometria, SLAM e Ground Truth</a:t>
+            </a:r>
+          </a:p>
+        </p:txBody>
+      </p:sp>
+      <p:sp>
+        <p:nvSpPr>
+          <p:cNvPr id="6" name="TextBox 5"/>
+          <p:cNvSpPr txBox="1"/>
+          <p:nvPr/>
+        </p:nvSpPr>
+        <p:spPr>
+          <a:xfrm>
+            <a:off x="457200" y="749808"/>
+            <a:ext cx="11430000" cy="347472"/>
+          </a:xfrm>
+          <a:prstGeom prst="rect">
+            <a:avLst/>
+          </a:prstGeom>
+          <a:noFill/>
+        </p:spPr>
+        <p:txBody>
+          <a:bodyPr wrap="square">
+            <a:spAutoFit/>
+          </a:bodyPr>
+          <a:lstStyle/>
+          <a:p>
+            <a:pPr algn="l"/>
+            <a:r>
+              <a:rPr sz="1400" b="0" i="0">
+                <a:solidFill>
+                  <a:srgbClr val="BFDBFF"/>
+                </a:solidFill>
+                <a:latin typeface="Calibri"/>
+              </a:rPr>
+              <a:t>odom vs. pose (SLAM) vs. ground truth nativo do Gazebo  ·  3 rotas, 10 réplicas cada</a:t>
+            </a:r>
+          </a:p>
+        </p:txBody>
+      </p:sp>
+      <p:sp>
+        <p:nvSpPr>
+          <p:cNvPr id="7" name="Rectangle 6"/>
+          <p:cNvSpPr/>
+          <p:nvPr/>
+        </p:nvSpPr>
+        <p:spPr>
+          <a:xfrm>
+            <a:off x="0" y="6537960"/>
+            <a:ext cx="12188952" cy="320040"/>
+          </a:xfrm>
+          <a:prstGeom prst="rect">
+            <a:avLst/>
+          </a:prstGeom>
+          <a:solidFill>
+            <a:srgbClr val="1B2A4A"/>
+          </a:solidFill>
+          <a:ln>
+            <a:noFill/>
+          </a:ln>
+        </p:spPr>
+        <p:style>
+          <a:lnRef idx="1">
+            <a:schemeClr val="accent1"/>
+          </a:lnRef>
+          <a:fillRef idx="3">
+            <a:schemeClr val="accent1"/>
+          </a:fillRef>
+          <a:effectRef idx="2">
+            <a:schemeClr val="accent1"/>
+          </a:effectRef>
+          <a:fontRef idx="minor">
+            <a:schemeClr val="lt1"/>
+          </a:fontRef>
+        </p:style>
+        <p:txBody>
+          <a:bodyPr rtlCol="0" anchor="ctr"/>
+          <a:lstStyle/>
+          <a:p>
+            <a:pPr algn="ctr"/>
+            <a:endParaRPr/>
+          </a:p>
+        </p:txBody>
+      </p:sp>
+      <p:sp>
+        <p:nvSpPr>
+          <p:cNvPr id="8" name="TextBox 7"/>
+          <p:cNvSpPr txBox="1"/>
+          <p:nvPr/>
+        </p:nvSpPr>
+        <p:spPr>
+          <a:xfrm>
+            <a:off x="365760" y="6556248"/>
+            <a:ext cx="7315200" cy="274320"/>
+          </a:xfrm>
+          <a:prstGeom prst="rect">
+            <a:avLst/>
+          </a:prstGeom>
+          <a:noFill/>
+        </p:spPr>
+        <p:txBody>
+          <a:bodyPr wrap="square">
+            <a:spAutoFit/>
+          </a:bodyPr>
+          <a:lstStyle/>
+          <a:p>
+            <a:pPr algn="l"/>
+            <a:r>
+              <a:rPr sz="1100" b="0" i="0">
+                <a:solidFill>
+                  <a:srgbClr val="BFDBFF"/>
+                </a:solidFill>
+                <a:latin typeface="Calibri"/>
+              </a:rPr>
+              <a:t>Seminário de Andamento · 2026</a:t>
+            </a:r>
+          </a:p>
+        </p:txBody>
+      </p:sp>
+      <p:sp>
+        <p:nvSpPr>
+          <p:cNvPr id="9" name="TextBox 8"/>
+          <p:cNvSpPr txBox="1"/>
+          <p:nvPr/>
+        </p:nvSpPr>
+        <p:spPr>
+          <a:xfrm>
+            <a:off x="8686800" y="6556248"/>
+            <a:ext cx="3200400" cy="274320"/>
+          </a:xfrm>
+          <a:prstGeom prst="rect">
+            <a:avLst/>
+          </a:prstGeom>
+          <a:noFill/>
+        </p:spPr>
+        <p:txBody>
+          <a:bodyPr wrap="square">
+            <a:spAutoFit/>
+          </a:bodyPr>
+          <a:lstStyle/>
+          <a:p>
+            <a:pPr algn="r"/>
+            <a:r>
+              <a:rPr sz="1100" b="0" i="0">
+                <a:solidFill>
+                  <a:srgbClr val="BFDBFF"/>
+                </a:solidFill>
+                <a:latin typeface="Calibri"/>
+              </a:rPr>
+              <a:t>Eduardo Wanderley</a:t>
+            </a:r>
+          </a:p>
+        </p:txBody>
+      </p:sp>
+      <p:sp>
+        <p:nvSpPr>
+          <p:cNvPr id="10" name="TextBox 9"/>
+          <p:cNvSpPr txBox="1"/>
+          <p:nvPr/>
+        </p:nvSpPr>
+        <p:spPr>
+          <a:xfrm>
+            <a:off x="457200" y="1371600"/>
+            <a:ext cx="5486400" cy="347472"/>
+          </a:xfrm>
+          <a:prstGeom prst="rect">
+            <a:avLst/>
+          </a:prstGeom>
+          <a:noFill/>
+        </p:spPr>
+        <p:txBody>
+          <a:bodyPr wrap="square">
+            <a:spAutoFit/>
+          </a:bodyPr>
+          <a:lstStyle/>
+          <a:p>
+            <a:pPr algn="l"/>
+            <a:r>
+              <a:rPr sz="1600" b="1" i="0">
+                <a:solidFill>
+                  <a:srgbClr val="1B2A4A"/>
+                </a:solidFill>
+                <a:latin typeface="Calibri"/>
+              </a:rPr>
+              <a:t>RMSE vs. Ground Truth, por rota (N=10)</a:t>
+            </a:r>
+          </a:p>
+        </p:txBody>
+      </p:sp>
+      <p:pic>
+        <p:nvPicPr>
+          <p:cNvPr id="60" name="Picture 60" descr="RMSE medio vs ground truth, por rota e fonte de trajetoria"/>
+          <p:cNvPicPr>
+            <a:picLocks noChangeAspect="1"/>
+          </p:cNvPicPr>
+          <p:nvPr/>
+        </p:nvPicPr>
+        <p:blipFill>
+          <a:blip r:embed="rId2"/>
+          <a:stretch>
+            <a:fillRect/>
+          </a:stretch>
+        </p:blipFill>
+        <p:spPr>
+          <a:xfrm>
+            <a:off x="457200" y="1755648"/>
+            <a:ext cx="5000000" cy="3214286"/>
+          </a:xfrm>
+          <a:prstGeom prst="rect">
+            <a:avLst/>
+          </a:prstGeom>
+        </p:spPr>
+      </p:pic>
+      <p:sp>
+        <p:nvSpPr>
+          <p:cNvPr id="61" name="Rectangle 61"/>
+          <p:cNvSpPr/>
+          <p:nvPr/>
+        </p:nvSpPr>
+        <p:spPr>
+          <a:xfrm>
+            <a:off x="5757200" y="1755648"/>
+            <a:ext cx="5974552" cy="1450000"/>
+          </a:xfrm>
+          <a:prstGeom prst="rect">
+            <a:avLst/>
+          </a:prstGeom>
+          <a:solidFill>
+            <a:srgbClr val="F3F4F6"/>
+          </a:solidFill>
+          <a:ln>
+            <a:noFill/>
+          </a:ln>
+        </p:spPr>
+        <p:style>
+          <a:lnRef idx="1">
+            <a:schemeClr val="accent1"/>
+          </a:lnRef>
+          <a:fillRef idx="3">
+            <a:schemeClr val="accent1"/>
+          </a:fillRef>
+          <a:effectRef idx="2">
+            <a:schemeClr val="accent1"/>
+          </a:effectRef>
+          <a:fontRef idx="minor">
+            <a:schemeClr val="lt1"/>
+          </a:fontRef>
+        </p:style>
+        <p:txBody>
+          <a:bodyPr rtlCol="0" anchor="ctr"/>
+          <a:lstStyle/>
+          <a:p>
+            <a:pPr algn="ctr"/>
+            <a:endParaRPr/>
+          </a:p>
+        </p:txBody>
+      </p:sp>
+      <p:sp>
+        <p:nvSpPr>
+          <p:cNvPr id="62" name="Rectangle 62"/>
+          <p:cNvSpPr/>
+          <p:nvPr/>
+        </p:nvSpPr>
+        <p:spPr>
+          <a:xfrm>
+            <a:off x="5757200" y="1755648"/>
+            <a:ext cx="5974552" cy="54864"/>
+          </a:xfrm>
+          <a:prstGeom prst="rect">
+            <a:avLst/>
+          </a:prstGeom>
+          <a:solidFill>
+            <a:srgbClr val="1B2A4A"/>
+          </a:solidFill>
+          <a:ln>
+            <a:noFill/>
+          </a:ln>
+        </p:spPr>
+        <p:style>
+          <a:lnRef idx="1">
+            <a:schemeClr val="accent1"/>
+          </a:lnRef>
+          <a:fillRef idx="3">
+            <a:schemeClr val="accent1"/>
+          </a:fillRef>
+          <a:effectRef idx="2">
+            <a:schemeClr val="accent1"/>
+          </a:effectRef>
+          <a:fontRef idx="minor">
+            <a:schemeClr val="lt1"/>
+          </a:fontRef>
+        </p:style>
+        <p:txBody>
+          <a:bodyPr rtlCol="0" anchor="ctr"/>
+          <a:lstStyle/>
+          <a:p>
+            <a:pPr algn="ctr"/>
+            <a:endParaRPr/>
+          </a:p>
+        </p:txBody>
+      </p:sp>
+      <p:sp>
+        <p:nvSpPr>
+          <p:cNvPr id="63" name="TextBox 63"/>
+          <p:cNvSpPr txBox="1"/>
+          <p:nvPr/>
+        </p:nvSpPr>
+        <p:spPr>
+          <a:xfrm>
+            <a:off x="5894360" y="1847088"/>
+            <a:ext cx="5700232" cy="292608"/>
+          </a:xfrm>
+          <a:prstGeom prst="rect">
+            <a:avLst/>
+          </a:prstGeom>
+          <a:noFill/>
+        </p:spPr>
+        <p:txBody>
+          <a:bodyPr wrap="square">
+            <a:spAutoFit/>
+          </a:bodyPr>
+          <a:lstStyle/>
+          <a:p>
+            <a:pPr algn="l"/>
+            <a:r>
+              <a:rPr sz="1200" b="0" i="0">
+                <a:solidFill>
+                  <a:srgbClr val="6B7280"/>
+                </a:solidFill>
+                <a:latin typeface="Calibri"/>
+              </a:rPr>
+              <a:t>Maior diferença — Rota Loop (~11,3 m, 4 curvas)</a:t>
+            </a:r>
+          </a:p>
+        </p:txBody>
+      </p:sp>
+      <p:sp>
+        <p:nvSpPr>
+          <p:cNvPr id="64" name="TextBox 64"/>
+          <p:cNvSpPr txBox="1"/>
+          <p:nvPr/>
+        </p:nvSpPr>
+        <p:spPr>
+          <a:xfrm>
+            <a:off x="5894360" y="2175648"/>
+            <a:ext cx="5700232" cy="500000"/>
+          </a:xfrm>
+          <a:prstGeom prst="rect">
+            <a:avLst/>
+          </a:prstGeom>
+          <a:noFill/>
+        </p:spPr>
+        <p:txBody>
+          <a:bodyPr wrap="square">
+            <a:spAutoFit/>
+          </a:bodyPr>
+          <a:lstStyle/>
+          <a:p>
+            <a:pPr algn="l"/>
+            <a:r>
+              <a:rPr sz="2400" b="1" i="0">
+                <a:solidFill>
+                  <a:srgbClr val="1B2A4A"/>
+                </a:solidFill>
+                <a:latin typeface="Calibri"/>
+              </a:rPr>
+              <a:t>~12 cm</a:t>
+            </a:r>
+          </a:p>
+        </p:txBody>
+      </p:sp>
+      <p:sp>
+        <p:nvSpPr>
+          <p:cNvPr id="65" name="TextBox 65"/>
+          <p:cNvSpPr txBox="1"/>
+          <p:nvPr/>
+        </p:nvSpPr>
+        <p:spPr>
+          <a:xfrm>
+            <a:off x="5894360" y="2705648"/>
+            <a:ext cx="5700232" cy="450000"/>
+          </a:xfrm>
+          <a:prstGeom prst="rect">
+            <a:avLst/>
+          </a:prstGeom>
+          <a:noFill/>
+        </p:spPr>
+        <p:txBody>
+          <a:bodyPr wrap="square">
+            <a:spAutoFit/>
+          </a:bodyPr>
+          <a:lstStyle/>
+          <a:p>
+            <a:pPr algn="l"/>
+            <a:r>
+              <a:rPr sz="1100" b="0" i="0">
+                <a:solidFill>
+                  <a:srgbClr val="6B7280"/>
+                </a:solidFill>
+                <a:latin typeface="Calibri"/>
+              </a:rPr>
+              <a:t>odom 14,27 cm  vs.  pose 2,45 cm</a:t>
+            </a:r>
+          </a:p>
+        </p:txBody>
+      </p:sp>
+      <p:sp>
+        <p:nvSpPr>
+          <p:cNvPr id="66" name="Rectangle 66"/>
+          <p:cNvSpPr/>
+          <p:nvPr/>
+        </p:nvSpPr>
+        <p:spPr>
+          <a:xfrm>
+            <a:off x="5757200" y="3355648"/>
+            <a:ext cx="5974552" cy="1450000"/>
+          </a:xfrm>
+          <a:prstGeom prst="rect">
+            <a:avLst/>
+          </a:prstGeom>
+          <a:solidFill>
+            <a:srgbClr val="F3F4F6"/>
+          </a:solidFill>
+          <a:ln>
+            <a:noFill/>
+          </a:ln>
+        </p:spPr>
+        <p:style>
+          <a:lnRef idx="1">
+            <a:schemeClr val="accent1"/>
+          </a:lnRef>
+          <a:fillRef idx="3">
+            <a:schemeClr val="accent1"/>
+          </a:fillRef>
+          <a:effectRef idx="2">
+            <a:schemeClr val="accent1"/>
+          </a:effectRef>
+          <a:fontRef idx="minor">
+            <a:schemeClr val="lt1"/>
+          </a:fontRef>
+        </p:style>
+        <p:txBody>
+          <a:bodyPr rtlCol="0" anchor="ctr"/>
+          <a:lstStyle/>
+          <a:p>
+            <a:pPr algn="ctr"/>
+            <a:endParaRPr/>
+          </a:p>
+        </p:txBody>
+      </p:sp>
+      <p:sp>
+        <p:nvSpPr>
+          <p:cNvPr id="67" name="Rectangle 67"/>
+          <p:cNvSpPr/>
+          <p:nvPr/>
+        </p:nvSpPr>
+        <p:spPr>
+          <a:xfrm>
+            <a:off x="5757200" y="3355648"/>
+            <a:ext cx="5974552" cy="54864"/>
+          </a:xfrm>
+          <a:prstGeom prst="rect">
+            <a:avLst/>
+          </a:prstGeom>
+          <a:solidFill>
+            <a:srgbClr val="1B2A4A"/>
+          </a:solidFill>
+          <a:ln>
+            <a:noFill/>
+          </a:ln>
+        </p:spPr>
+        <p:style>
+          <a:lnRef idx="1">
+            <a:schemeClr val="accent1"/>
+          </a:lnRef>
+          <a:fillRef idx="3">
+            <a:schemeClr val="accent1"/>
+          </a:fillRef>
+          <a:effectRef idx="2">
+            <a:schemeClr val="accent1"/>
+          </a:effectRef>
+          <a:fontRef idx="minor">
+            <a:schemeClr val="lt1"/>
+          </a:fontRef>
+        </p:style>
+        <p:txBody>
+          <a:bodyPr rtlCol="0" anchor="ctr"/>
+          <a:lstStyle/>
+          <a:p>
+            <a:pPr algn="ctr"/>
+            <a:endParaRPr/>
+          </a:p>
+        </p:txBody>
+      </p:sp>
+      <p:sp>
+        <p:nvSpPr>
+          <p:cNvPr id="68" name="TextBox 68"/>
+          <p:cNvSpPr txBox="1"/>
+          <p:nvPr/>
+        </p:nvSpPr>
+        <p:spPr>
+          <a:xfrm>
+            <a:off x="5894360" y="3447088"/>
+            <a:ext cx="5700232" cy="292608"/>
+          </a:xfrm>
+          <a:prstGeom prst="rect">
+            <a:avLst/>
+          </a:prstGeom>
+          <a:noFill/>
+        </p:spPr>
+        <p:txBody>
+          <a:bodyPr wrap="square">
+            <a:spAutoFit/>
+          </a:bodyPr>
+          <a:lstStyle/>
+          <a:p>
+            <a:pPr algn="l"/>
+            <a:r>
+              <a:rPr sz="1200" b="0" i="0">
+                <a:solidFill>
+                  <a:srgbClr val="6B7280"/>
+                </a:solidFill>
+                <a:latin typeface="Calibri"/>
+              </a:rPr>
+              <a:t>Rota Curta (~0,9 m) — mesma da campanha principal</a:t>
+            </a:r>
+          </a:p>
+        </p:txBody>
+      </p:sp>
+      <p:sp>
+        <p:nvSpPr>
+          <p:cNvPr id="69" name="TextBox 69"/>
+          <p:cNvSpPr txBox="1"/>
+          <p:nvPr/>
+        </p:nvSpPr>
+        <p:spPr>
+          <a:xfrm>
+            <a:off x="5894360" y="3775648"/>
+            <a:ext cx="5700232" cy="500000"/>
+          </a:xfrm>
+          <a:prstGeom prst="rect">
+            <a:avLst/>
+          </a:prstGeom>
+          <a:noFill/>
+        </p:spPr>
+        <p:txBody>
+          <a:bodyPr wrap="square">
+            <a:spAutoFit/>
+          </a:bodyPr>
+          <a:lstStyle/>
+          <a:p>
+            <a:pPr algn="l"/>
+            <a:r>
+              <a:rPr sz="2400" b="1" i="0">
+                <a:solidFill>
+                  <a:srgbClr val="1B2A4A"/>
+                </a:solidFill>
+                <a:latin typeface="Calibri"/>
+              </a:rPr>
+              <a:t>&lt; 4 cm</a:t>
+            </a:r>
+          </a:p>
+        </p:txBody>
+      </p:sp>
+      <p:sp>
+        <p:nvSpPr>
+          <p:cNvPr id="70" name="TextBox 70"/>
+          <p:cNvSpPr txBox="1"/>
+          <p:nvPr/>
+        </p:nvSpPr>
+        <p:spPr>
+          <a:xfrm>
+            <a:off x="5894360" y="4305648"/>
+            <a:ext cx="5700232" cy="450000"/>
+          </a:xfrm>
+          <a:prstGeom prst="rect">
+            <a:avLst/>
+          </a:prstGeom>
+          <a:noFill/>
+        </p:spPr>
+        <p:txBody>
+          <a:bodyPr wrap="square">
+            <a:spAutoFit/>
+          </a:bodyPr>
+          <a:lstStyle/>
+          <a:p>
+            <a:pPr algn="l"/>
+            <a:r>
+              <a:rPr sz="1100" b="0" i="0">
+                <a:solidFill>
+                  <a:srgbClr val="6B7280"/>
+                </a:solidFill>
+                <a:latin typeface="Calibri"/>
+              </a:rPr>
+              <a:t>odom 0,01 cm  vs.  pose 3,28 cm — diferença desprezível</a:t>
+            </a:r>
+          </a:p>
+        </p:txBody>
+      </p:sp>
+      <p:sp>
+        <p:nvSpPr>
+          <p:cNvPr id="52" name="Rectangle 51"/>
+          <p:cNvSpPr/>
+          <p:nvPr/>
+        </p:nvSpPr>
+        <p:spPr>
+          <a:xfrm>
+            <a:off x="457200" y="5100000"/>
+            <a:ext cx="11274552" cy="950000"/>
+          </a:xfrm>
+          <a:prstGeom prst="rect">
+            <a:avLst/>
+          </a:prstGeom>
+          <a:solidFill>
+            <a:srgbClr val="F3F4F6"/>
+          </a:solidFill>
+          <a:ln>
+            <a:noFill/>
+          </a:ln>
+        </p:spPr>
+        <p:style>
+          <a:lnRef idx="1">
+            <a:schemeClr val="accent1"/>
+          </a:lnRef>
+          <a:fillRef idx="3">
+            <a:schemeClr val="accent1"/>
+          </a:fillRef>
+          <a:effectRef idx="2">
+            <a:schemeClr val="accent1"/>
+          </a:effectRef>
+          <a:fontRef idx="minor">
+            <a:schemeClr val="lt1"/>
+          </a:fontRef>
+        </p:style>
+        <p:txBody>
+          <a:bodyPr rtlCol="0" anchor="ctr"/>
+          <a:lstStyle/>
+          <a:p>
+            <a:pPr algn="ctr"/>
+            <a:endParaRPr/>
+          </a:p>
+        </p:txBody>
+      </p:sp>
+      <p:sp>
+        <p:nvSpPr>
+          <p:cNvPr id="53" name="Rectangle 52"/>
+          <p:cNvSpPr/>
+          <p:nvPr/>
+        </p:nvSpPr>
+        <p:spPr>
+          <a:xfrm>
+            <a:off x="457200" y="5100000"/>
+            <a:ext cx="91440" cy="950000"/>
+          </a:xfrm>
+          <a:prstGeom prst="rect">
+            <a:avLst/>
+          </a:prstGeom>
+          <a:solidFill>
+            <a:srgbClr val="059669"/>
+          </a:solidFill>
+          <a:ln>
+            <a:noFill/>
+          </a:ln>
+        </p:spPr>
+        <p:style>
+          <a:lnRef idx="1">
+            <a:schemeClr val="accent1"/>
+          </a:lnRef>
+          <a:fillRef idx="3">
+            <a:schemeClr val="accent1"/>
+          </a:fillRef>
+          <a:effectRef idx="2">
+            <a:schemeClr val="accent1"/>
+          </a:effectRef>
+          <a:fontRef idx="minor">
+            <a:schemeClr val="lt1"/>
+          </a:fontRef>
+        </p:style>
+        <p:txBody>
+          <a:bodyPr rtlCol="0" anchor="ctr"/>
+          <a:lstStyle/>
+          <a:p>
+            <a:pPr algn="ctr"/>
+            <a:endParaRPr/>
+          </a:p>
+        </p:txBody>
+      </p:sp>
+      <p:sp>
+        <p:nvSpPr>
+          <p:cNvPr id="54" name="TextBox 53"/>
+          <p:cNvSpPr txBox="1"/>
+          <p:nvPr/>
+        </p:nvSpPr>
+        <p:spPr>
+          <a:xfrm>
+            <a:off x="685800" y="5173152"/>
+            <a:ext cx="10972800" cy="347472"/>
+          </a:xfrm>
+          <a:prstGeom prst="rect">
+            <a:avLst/>
+          </a:prstGeom>
+          <a:noFill/>
+        </p:spPr>
+        <p:txBody>
+          <a:bodyPr wrap="square">
+            <a:spAutoFit/>
+          </a:bodyPr>
+          <a:lstStyle/>
+          <a:p>
+            <a:pPr algn="l"/>
+            <a:r>
+              <a:rPr sz="1500" b="1" i="0">
+                <a:solidFill>
+                  <a:srgbClr val="1B2A4A"/>
+                </a:solidFill>
+                <a:latin typeface="Calibri"/>
+              </a:rPr>
+              <a:t>Rota curta: diferença desprezível (&lt; 4 cm) — valida a escolha metodológica da campanha principal.</a:t>
+            </a:r>
+          </a:p>
+        </p:txBody>
+      </p:sp>
+      <p:sp>
+        <p:nvSpPr>
+          <p:cNvPr id="55" name="TextBox 54"/>
+          <p:cNvSpPr txBox="1"/>
+          <p:nvPr/>
+        </p:nvSpPr>
+        <p:spPr>
+          <a:xfrm>
+            <a:off x="685800" y="5540624"/>
+            <a:ext cx="10972800" cy="411480"/>
+          </a:xfrm>
+          <a:prstGeom prst="rect">
+            <a:avLst/>
+          </a:prstGeom>
+          <a:noFill/>
+        </p:spPr>
+        <p:txBody>
+          <a:bodyPr wrap="square">
+            <a:spAutoFit/>
+          </a:bodyPr>
+          <a:lstStyle/>
+          <a:p>
+            <a:pPr algn="l"/>
+            <a:r>
+              <a:rPr sz="1300" b="0" i="0">
+                <a:solidFill>
+                  <a:srgbClr val="6B7280"/>
+                </a:solidFill>
+                <a:latin typeface="Calibri"/>
+              </a:rPr>
+              <a:t>Em rotas mais longas, a diferença chega a ~12 cm — a fonte de trajetória passa a importar para a conclusão sobre repetibilidade.</a:t>
             </a:r>
           </a:p>
         </p:txBody>

--- a/disserta-apresenta/apresentacao_seminario.pptx
+++ b/disserta-apresenta/apresentacao_seminario.pptx
@@ -7009,7 +7009,7 @@
                 </a:solidFill>
                 <a:latin typeface="Calibri"/>
               </a:rPr>
-              <a:t>✓  Multi-robô operacional (2 robôs simultâneos, validado) + camada de agentes de IA</a:t>
+              <a:t>✓  Multi-robô via ativação sequencial (2 robôs, 70% sucesso) + camada de agentes de IA</a:t>
             </a:r>
           </a:p>
         </p:txBody>
@@ -11592,7 +11592,7 @@
                 </a:solidFill>
                 <a:latin typeface="Calibri"/>
               </a:rPr>
-              <a:t>React + Vite  ·  FastAPI  ·  Editor JSON  ·  Painel multi-robô  ·  Painel de Agentes de IA</a:t>
+              <a:t>React + Vite  ·  FastAPI  ·  Editor JSON  ·  Missão Coordenada  ·  Painel de Agentes de IA</a:t>
             </a:r>
           </a:p>
         </p:txBody>
@@ -11706,7 +11706,7 @@
                 </a:solidFill>
                 <a:latin typeface="Calibri"/>
               </a:rPr>
-              <a:t>7 serviços ROS 2  ·  Record / Replay  ·  Nav2 Actions  ·  Até 3 robôs simultâneos</a:t>
+              <a:t>7 serviços ROS 2  ·  Record / Replay  ·  Nav2 Actions  ·  Multi-robô via ativação sequencial</a:t>
             </a:r>
           </a:p>
         </p:txBody>

--- a/disserta-apresenta/apresentacao_seminario.pptx
+++ b/disserta-apresenta/apresentacao_seminario.pptx
@@ -5817,7 +5817,7 @@
                 </a:solidFill>
                 <a:latin typeface="Calibri"/>
               </a:rPr>
-              <a:t>✅  Corrigido: prioriza pose do SLAM; MPPI documentado como fonte de variância conhecida</a:t>
+              <a:t>✅  Corrigido: detecção automática prioriza amcl_pose &gt; pose SLAM &gt; odom; MPPI documentado como variância conhecida</a:t>
             </a:r>
           </a:p>
         </p:txBody>
